--- a/assets/pptx/catalog-47.pptx
+++ b/assets/pptx/catalog-47.pptx
@@ -3465,7 +3465,7 @@
                 <a:ea typeface="Ebrima"/>
                 <a:cs typeface="Ebrima"/>
               </a:rPr>
-              <a:t>ጌታ ሆይ ምህረትህን አብዛልኝ (2x)</a:t>
+              <a:t>ጌታ ሆይ ምህረትህን አብዛልኝ 2x</a:t>
             </a:r>
           </a:p>
         </p:txBody>
@@ -3867,7 +3867,7 @@
                 <a:ea typeface="Ebrima"/>
                 <a:cs typeface="Ebrima"/>
               </a:rPr>
-              <a:t>ጌታ ሆይ ምህረትህን አብዛልኝ (2x)</a:t>
+              <a:t>ጌታ ሆይ ምህረትህን አብዛልኝ 2x</a:t>
             </a:r>
           </a:p>
         </p:txBody>
@@ -4336,7 +4336,7 @@
                 <a:ea typeface="Ebrima"/>
                 <a:cs typeface="Ebrima"/>
               </a:rPr>
-              <a:t>ጌታ ሆይ ምህረትህን አብዛልኝ (2x)</a:t>
+              <a:t>ጌታ ሆይ ምህረትህን አብዛልኝ 2x</a:t>
             </a:r>
           </a:p>
         </p:txBody>
@@ -4671,7 +4671,7 @@
                 <a:ea typeface="Ebrima"/>
                 <a:cs typeface="Ebrima"/>
               </a:rPr>
-              <a:t>ጌታ ሆይ ምህረትህን አብዛልኝ (2x)</a:t>
+              <a:t>ጌታ ሆይ ምህረትህን አብዛልኝ 2x</a:t>
             </a:r>
           </a:p>
         </p:txBody>
